--- a/2024/2024-05-17-AI-Updates.pptx
+++ b/2024/2024-05-17-AI-Updates.pptx
@@ -973,7 +973,7 @@
   <p:cSld>
     <p:spTree>
       <p:nvGrpSpPr>
-        <p:cNvPr id="1" name="Shape 157"/>
+        <p:cNvPr id="1" name="Shape 153"/>
         <p:cNvGrpSpPr/>
         <p:nvPr/>
       </p:nvGrpSpPr>
@@ -987,7 +987,7 @@
       </p:grpSpPr>
       <p:sp>
         <p:nvSpPr>
-          <p:cNvPr id="158" name="Google Shape;158;g2dd42028c3e_1_27:notes"/>
+          <p:cNvPr id="154" name="Google Shape;154;g2dd42028c3e_1_27:notes"/>
           <p:cNvSpPr>
             <a:spLocks noGrp="1" noRot="1" noChangeAspect="1"/>
           </p:cNvSpPr>
@@ -1038,7 +1038,7 @@
       </p:sp>
       <p:sp>
         <p:nvSpPr>
-          <p:cNvPr id="159" name="Google Shape;159;g2dd42028c3e_1_27:notes"/>
+          <p:cNvPr id="155" name="Google Shape;155;g2dd42028c3e_1_27:notes"/>
           <p:cNvSpPr txBox="1">
             <a:spLocks noGrp="1"/>
           </p:cNvSpPr>
@@ -1095,7 +1095,7 @@
   <p:cSld>
     <p:spTree>
       <p:nvGrpSpPr>
-        <p:cNvPr id="1" name="Shape 168"/>
+        <p:cNvPr id="1" name="Shape 164"/>
         <p:cNvGrpSpPr/>
         <p:nvPr/>
       </p:nvGrpSpPr>
@@ -1109,7 +1109,7 @@
       </p:grpSpPr>
       <p:sp>
         <p:nvSpPr>
-          <p:cNvPr id="169" name="Google Shape;169;g2ddbbf5bd38_0_95:notes"/>
+          <p:cNvPr id="165" name="Google Shape;165;g2ddbbf5bd38_0_95:notes"/>
           <p:cNvSpPr>
             <a:spLocks noGrp="1" noRot="1" noChangeAspect="1"/>
           </p:cNvSpPr>
@@ -1160,7 +1160,7 @@
       </p:sp>
       <p:sp>
         <p:nvSpPr>
-          <p:cNvPr id="170" name="Google Shape;170;g2ddbbf5bd38_0_95:notes"/>
+          <p:cNvPr id="166" name="Google Shape;166;g2ddbbf5bd38_0_95:notes"/>
           <p:cNvSpPr txBox="1">
             <a:spLocks noGrp="1"/>
           </p:cNvSpPr>
@@ -1217,7 +1217,7 @@
   <p:cSld>
     <p:spTree>
       <p:nvGrpSpPr>
-        <p:cNvPr id="1" name="Shape 176"/>
+        <p:cNvPr id="1" name="Shape 172"/>
         <p:cNvGrpSpPr/>
         <p:nvPr/>
       </p:nvGrpSpPr>
@@ -1231,7 +1231,7 @@
       </p:grpSpPr>
       <p:sp>
         <p:nvSpPr>
-          <p:cNvPr id="177" name="Google Shape;177;g202f8b223fd_0_14:notes"/>
+          <p:cNvPr id="173" name="Google Shape;173;g202f8b223fd_0_14:notes"/>
           <p:cNvSpPr>
             <a:spLocks noGrp="1" noRot="1" noChangeAspect="1"/>
           </p:cNvSpPr>
@@ -1282,7 +1282,7 @@
       </p:sp>
       <p:sp>
         <p:nvSpPr>
-          <p:cNvPr id="178" name="Google Shape;178;g202f8b223fd_0_14:notes"/>
+          <p:cNvPr id="174" name="Google Shape;174;g202f8b223fd_0_14:notes"/>
           <p:cNvSpPr txBox="1">
             <a:spLocks noGrp="1"/>
           </p:cNvSpPr>
@@ -1339,7 +1339,7 @@
   <p:cSld>
     <p:spTree>
       <p:nvGrpSpPr>
-        <p:cNvPr id="1" name="Shape 192"/>
+        <p:cNvPr id="1" name="Shape 188"/>
         <p:cNvGrpSpPr/>
         <p:nvPr/>
       </p:nvGrpSpPr>
@@ -1353,7 +1353,7 @@
       </p:grpSpPr>
       <p:sp>
         <p:nvSpPr>
-          <p:cNvPr id="193" name="Google Shape;193;p21:notes"/>
+          <p:cNvPr id="189" name="Google Shape;189;p21:notes"/>
           <p:cNvSpPr>
             <a:spLocks noGrp="1" noRot="1" noChangeAspect="1"/>
           </p:cNvSpPr>
@@ -1404,7 +1404,7 @@
       </p:sp>
       <p:sp>
         <p:nvSpPr>
-          <p:cNvPr id="194" name="Google Shape;194;p21:notes"/>
+          <p:cNvPr id="190" name="Google Shape;190;p21:notes"/>
           <p:cNvSpPr txBox="1">
             <a:spLocks noGrp="1"/>
           </p:cNvSpPr>
@@ -1461,7 +1461,7 @@
   <p:cSld>
     <p:spTree>
       <p:nvGrpSpPr>
-        <p:cNvPr id="1" name="Shape 202"/>
+        <p:cNvPr id="1" name="Shape 198"/>
         <p:cNvGrpSpPr/>
         <p:nvPr/>
       </p:nvGrpSpPr>
@@ -1475,7 +1475,7 @@
       </p:grpSpPr>
       <p:sp>
         <p:nvSpPr>
-          <p:cNvPr id="203" name="Google Shape;203;p22:notes"/>
+          <p:cNvPr id="199" name="Google Shape;199;p22:notes"/>
           <p:cNvSpPr>
             <a:spLocks noGrp="1" noRot="1" noChangeAspect="1"/>
           </p:cNvSpPr>
@@ -1526,7 +1526,7 @@
       </p:sp>
       <p:sp>
         <p:nvSpPr>
-          <p:cNvPr id="204" name="Google Shape;204;p22:notes"/>
+          <p:cNvPr id="200" name="Google Shape;200;p22:notes"/>
           <p:cNvSpPr txBox="1">
             <a:spLocks noGrp="1"/>
           </p:cNvSpPr>
@@ -1583,7 +1583,7 @@
   <p:cSld>
     <p:spTree>
       <p:nvGrpSpPr>
-        <p:cNvPr id="1" name="Shape 212"/>
+        <p:cNvPr id="1" name="Shape 208"/>
         <p:cNvGrpSpPr/>
         <p:nvPr/>
       </p:nvGrpSpPr>
@@ -1597,7 +1597,7 @@
       </p:grpSpPr>
       <p:sp>
         <p:nvSpPr>
-          <p:cNvPr id="213" name="Google Shape;213;p23:notes"/>
+          <p:cNvPr id="209" name="Google Shape;209;p23:notes"/>
           <p:cNvSpPr>
             <a:spLocks noGrp="1" noRot="1" noChangeAspect="1"/>
           </p:cNvSpPr>
@@ -1648,7 +1648,7 @@
       </p:sp>
       <p:sp>
         <p:nvSpPr>
-          <p:cNvPr id="214" name="Google Shape;214;p23:notes"/>
+          <p:cNvPr id="210" name="Google Shape;210;p23:notes"/>
           <p:cNvSpPr txBox="1">
             <a:spLocks noGrp="1"/>
           </p:cNvSpPr>
@@ -2437,7 +2437,7 @@
   <p:cSld>
     <p:spTree>
       <p:nvGrpSpPr>
-        <p:cNvPr id="1" name="Shape 135"/>
+        <p:cNvPr id="1" name="Shape 131"/>
         <p:cNvGrpSpPr/>
         <p:nvPr/>
       </p:nvGrpSpPr>
@@ -2451,7 +2451,7 @@
       </p:grpSpPr>
       <p:sp>
         <p:nvSpPr>
-          <p:cNvPr id="136" name="Google Shape;136;g2ddbbf5bd38_0_4:notes"/>
+          <p:cNvPr id="132" name="Google Shape;132;g2ddbbf5bd38_0_4:notes"/>
           <p:cNvSpPr>
             <a:spLocks noGrp="1" noRot="1" noChangeAspect="1"/>
           </p:cNvSpPr>
@@ -2502,7 +2502,7 @@
       </p:sp>
       <p:sp>
         <p:nvSpPr>
-          <p:cNvPr id="137" name="Google Shape;137;g2ddbbf5bd38_0_4:notes"/>
+          <p:cNvPr id="133" name="Google Shape;133;g2ddbbf5bd38_0_4:notes"/>
           <p:cNvSpPr txBox="1">
             <a:spLocks noGrp="1"/>
           </p:cNvSpPr>
@@ -2559,7 +2559,7 @@
   <p:cSld>
     <p:spTree>
       <p:nvGrpSpPr>
-        <p:cNvPr id="1" name="Shape 150"/>
+        <p:cNvPr id="1" name="Shape 146"/>
         <p:cNvGrpSpPr/>
         <p:nvPr/>
       </p:nvGrpSpPr>
@@ -2573,7 +2573,7 @@
       </p:grpSpPr>
       <p:sp>
         <p:nvSpPr>
-          <p:cNvPr id="151" name="Google Shape;151;g2ddbbf5bd38_0_79:notes"/>
+          <p:cNvPr id="147" name="Google Shape;147;g2ddbbf5bd38_0_79:notes"/>
           <p:cNvSpPr>
             <a:spLocks noGrp="1" noRot="1" noChangeAspect="1"/>
           </p:cNvSpPr>
@@ -2624,7 +2624,7 @@
       </p:sp>
       <p:sp>
         <p:nvSpPr>
-          <p:cNvPr id="152" name="Google Shape;152;g2ddbbf5bd38_0_79:notes"/>
+          <p:cNvPr id="148" name="Google Shape;148;g2ddbbf5bd38_0_79:notes"/>
           <p:cNvSpPr txBox="1">
             <a:spLocks noGrp="1"/>
           </p:cNvSpPr>
@@ -11588,7 +11588,7 @@
   <p:cSld>
     <p:spTree>
       <p:nvGrpSpPr>
-        <p:cNvPr id="1" name="Shape 160"/>
+        <p:cNvPr id="1" name="Shape 156"/>
         <p:cNvGrpSpPr/>
         <p:nvPr/>
       </p:nvGrpSpPr>
@@ -11602,7 +11602,7 @@
       </p:grpSpPr>
       <p:sp>
         <p:nvSpPr>
-          <p:cNvPr id="161" name="Google Shape;161;p23"/>
+          <p:cNvPr id="157" name="Google Shape;157;p23"/>
           <p:cNvSpPr txBox="1"/>
           <p:nvPr/>
         </p:nvSpPr>
@@ -11668,7 +11668,7 @@
       </p:sp>
       <p:sp>
         <p:nvSpPr>
-          <p:cNvPr id="162" name="Google Shape;162;p23"/>
+          <p:cNvPr id="158" name="Google Shape;158;p23"/>
           <p:cNvSpPr txBox="1"/>
           <p:nvPr/>
         </p:nvSpPr>
@@ -12154,7 +12154,7 @@
       </p:sp>
       <p:pic>
         <p:nvPicPr>
-          <p:cNvPr id="163" name="Google Shape;163;p23"/>
+          <p:cNvPr id="159" name="Google Shape;159;p23"/>
           <p:cNvPicPr preferRelativeResize="0"/>
           <p:nvPr/>
         </p:nvPicPr>
@@ -12192,7 +12192,7 @@
       </p:pic>
       <p:pic>
         <p:nvPicPr>
-          <p:cNvPr id="164" name="Google Shape;164;p23"/>
+          <p:cNvPr id="160" name="Google Shape;160;p23"/>
           <p:cNvPicPr preferRelativeResize="0"/>
           <p:nvPr/>
         </p:nvPicPr>
@@ -12225,7 +12225,7 @@
       </p:pic>
       <p:pic>
         <p:nvPicPr>
-          <p:cNvPr id="165" name="Google Shape;165;p23"/>
+          <p:cNvPr id="161" name="Google Shape;161;p23"/>
           <p:cNvPicPr preferRelativeResize="0"/>
           <p:nvPr/>
         </p:nvPicPr>
@@ -12257,7 +12257,7 @@
       </p:pic>
       <p:sp>
         <p:nvSpPr>
-          <p:cNvPr id="166" name="Google Shape;166;p23"/>
+          <p:cNvPr id="162" name="Google Shape;162;p23"/>
           <p:cNvSpPr txBox="1"/>
           <p:nvPr/>
         </p:nvSpPr>
@@ -12323,7 +12323,7 @@
       </p:sp>
       <p:sp>
         <p:nvSpPr>
-          <p:cNvPr id="167" name="Google Shape;167;p23"/>
+          <p:cNvPr id="163" name="Google Shape;163;p23"/>
           <p:cNvSpPr txBox="1"/>
           <p:nvPr/>
         </p:nvSpPr>
@@ -12400,7 +12400,7 @@
   <p:cSld>
     <p:spTree>
       <p:nvGrpSpPr>
-        <p:cNvPr id="1" name="Shape 171"/>
+        <p:cNvPr id="1" name="Shape 167"/>
         <p:cNvGrpSpPr/>
         <p:nvPr/>
       </p:nvGrpSpPr>
@@ -12414,7 +12414,7 @@
       </p:grpSpPr>
       <p:sp>
         <p:nvSpPr>
-          <p:cNvPr id="172" name="Google Shape;172;p24"/>
+          <p:cNvPr id="168" name="Google Shape;168;p24"/>
           <p:cNvSpPr txBox="1"/>
           <p:nvPr/>
         </p:nvSpPr>
@@ -12493,7 +12493,7 @@
       </p:sp>
       <p:sp>
         <p:nvSpPr>
-          <p:cNvPr id="173" name="Google Shape;173;p24"/>
+          <p:cNvPr id="169" name="Google Shape;169;p24"/>
           <p:cNvSpPr txBox="1"/>
           <p:nvPr/>
         </p:nvSpPr>
@@ -12559,7 +12559,7 @@
       </p:sp>
       <p:graphicFrame>
         <p:nvGraphicFramePr>
-          <p:cNvPr id="174" name="Google Shape;174;p24"/>
+          <p:cNvPr id="170" name="Google Shape;170;p24"/>
           <p:cNvGraphicFramePr/>
           <p:nvPr/>
         </p:nvGraphicFramePr>
@@ -12572,7 +12572,7 @@
             <a:tbl>
               <a:tblPr>
                 <a:noFill/>
-                <a:tableStyleId>{3EA7C72C-350E-48B4-9140-AC023A573A22}</a:tableStyleId>
+                <a:tableStyleId>{0D451C86-E476-4C53-B53A-DE2845CE29B8}</a:tableStyleId>
               </a:tblPr>
               <a:tblGrid>
                 <a:gridCol w="674275">
@@ -22953,7 +22953,7 @@
       </p:graphicFrame>
       <p:sp>
         <p:nvSpPr>
-          <p:cNvPr id="175" name="Google Shape;175;p24"/>
+          <p:cNvPr id="171" name="Google Shape;171;p24"/>
           <p:cNvSpPr txBox="1"/>
           <p:nvPr/>
         </p:nvSpPr>
@@ -23146,7 +23146,7 @@
   <p:cSld>
     <p:spTree>
       <p:nvGrpSpPr>
-        <p:cNvPr id="1" name="Shape 179"/>
+        <p:cNvPr id="1" name="Shape 175"/>
         <p:cNvGrpSpPr/>
         <p:nvPr/>
       </p:nvGrpSpPr>
@@ -23160,7 +23160,7 @@
       </p:grpSpPr>
       <p:sp>
         <p:nvSpPr>
-          <p:cNvPr id="180" name="Google Shape;180;p25"/>
+          <p:cNvPr id="176" name="Google Shape;176;p25"/>
           <p:cNvSpPr txBox="1"/>
           <p:nvPr/>
         </p:nvSpPr>
@@ -23226,7 +23226,7 @@
       </p:sp>
       <p:sp>
         <p:nvSpPr>
-          <p:cNvPr id="181" name="Google Shape;181;p25"/>
+          <p:cNvPr id="177" name="Google Shape;177;p25"/>
           <p:cNvSpPr txBox="1"/>
           <p:nvPr/>
         </p:nvSpPr>
@@ -23347,7 +23347,7 @@
       </p:sp>
       <p:pic>
         <p:nvPicPr>
-          <p:cNvPr id="182" name="Google Shape;182;p25"/>
+          <p:cNvPr id="178" name="Google Shape;178;p25"/>
           <p:cNvPicPr preferRelativeResize="0"/>
           <p:nvPr/>
         </p:nvPicPr>
@@ -23375,7 +23375,7 @@
       </p:pic>
       <p:pic>
         <p:nvPicPr>
-          <p:cNvPr id="183" name="Google Shape;183;p25"/>
+          <p:cNvPr id="179" name="Google Shape;179;p25"/>
           <p:cNvPicPr preferRelativeResize="0"/>
           <p:nvPr/>
         </p:nvPicPr>
@@ -23414,7 +23414,7 @@
       </p:pic>
       <p:pic>
         <p:nvPicPr>
-          <p:cNvPr id="184" name="Google Shape;184;p25"/>
+          <p:cNvPr id="180" name="Google Shape;180;p25"/>
           <p:cNvPicPr preferRelativeResize="0"/>
           <p:nvPr/>
         </p:nvPicPr>
@@ -23446,7 +23446,7 @@
       </p:pic>
       <p:sp>
         <p:nvSpPr>
-          <p:cNvPr id="185" name="Google Shape;185;p25"/>
+          <p:cNvPr id="181" name="Google Shape;181;p25"/>
           <p:cNvSpPr txBox="1"/>
           <p:nvPr/>
         </p:nvSpPr>
@@ -23579,7 +23579,7 @@
       </p:sp>
       <p:sp>
         <p:nvSpPr>
-          <p:cNvPr id="186" name="Google Shape;186;p25"/>
+          <p:cNvPr id="182" name="Google Shape;182;p25"/>
           <p:cNvSpPr txBox="1"/>
           <p:nvPr/>
         </p:nvSpPr>
@@ -23646,7 +23646,31 @@
                 <a:cs typeface="Calibri"/>
                 <a:sym typeface="Calibri"/>
               </a:rPr>
-              <a:t> (formerly Cody) - local or remote LLMs</a:t>
+              <a:t> (formerly </a:t>
+            </a:r>
+            <a:r>
+              <a:rPr lang="en" sz="1300" b="1">
+                <a:solidFill>
+                  <a:srgbClr val="FF0000"/>
+                </a:solidFill>
+                <a:latin typeface="Calibri"/>
+                <a:ea typeface="Calibri"/>
+                <a:cs typeface="Calibri"/>
+                <a:sym typeface="Calibri"/>
+              </a:rPr>
+              <a:t>Cody</a:t>
+            </a:r>
+            <a:r>
+              <a:rPr lang="en" sz="1300">
+                <a:solidFill>
+                  <a:schemeClr val="dk1"/>
+                </a:solidFill>
+                <a:latin typeface="Calibri"/>
+                <a:ea typeface="Calibri"/>
+                <a:cs typeface="Calibri"/>
+                <a:sym typeface="Calibri"/>
+              </a:rPr>
+              <a:t>) - local or remote LLMs</a:t>
             </a:r>
             <a:endParaRPr sz="1300">
               <a:solidFill>
@@ -23712,7 +23736,7 @@
       </p:sp>
       <p:sp>
         <p:nvSpPr>
-          <p:cNvPr id="187" name="Google Shape;187;p25"/>
+          <p:cNvPr id="183" name="Google Shape;183;p25"/>
           <p:cNvSpPr txBox="1"/>
           <p:nvPr/>
         </p:nvSpPr>
@@ -23894,7 +23918,7 @@
       </p:sp>
       <p:sp>
         <p:nvSpPr>
-          <p:cNvPr id="188" name="Google Shape;188;p25"/>
+          <p:cNvPr id="184" name="Google Shape;184;p25"/>
           <p:cNvSpPr txBox="1"/>
           <p:nvPr/>
         </p:nvSpPr>
@@ -24027,7 +24051,7 @@
       </p:sp>
       <p:pic>
         <p:nvPicPr>
-          <p:cNvPr id="189" name="Google Shape;189;p25"/>
+          <p:cNvPr id="185" name="Google Shape;185;p25"/>
           <p:cNvPicPr preferRelativeResize="0"/>
           <p:nvPr/>
         </p:nvPicPr>
@@ -24059,7 +24083,7 @@
       </p:pic>
       <p:pic>
         <p:nvPicPr>
-          <p:cNvPr id="190" name="Google Shape;190;p25"/>
+          <p:cNvPr id="186" name="Google Shape;186;p25"/>
           <p:cNvPicPr preferRelativeResize="0"/>
           <p:nvPr/>
         </p:nvPicPr>
@@ -24091,7 +24115,7 @@
       </p:pic>
       <p:pic>
         <p:nvPicPr>
-          <p:cNvPr id="191" name="Google Shape;191;p25"/>
+          <p:cNvPr id="187" name="Google Shape;187;p25"/>
           <p:cNvPicPr preferRelativeResize="0"/>
           <p:nvPr/>
         </p:nvPicPr>
@@ -24135,7 +24159,7 @@
   <p:cSld>
     <p:spTree>
       <p:nvGrpSpPr>
-        <p:cNvPr id="1" name="Shape 195"/>
+        <p:cNvPr id="1" name="Shape 191"/>
         <p:cNvGrpSpPr/>
         <p:nvPr/>
       </p:nvGrpSpPr>
@@ -24149,7 +24173,7 @@
       </p:grpSpPr>
       <p:pic>
         <p:nvPicPr>
-          <p:cNvPr id="196" name="Google Shape;196;p26"/>
+          <p:cNvPr id="192" name="Google Shape;192;p26"/>
           <p:cNvPicPr preferRelativeResize="0"/>
           <p:nvPr/>
         </p:nvPicPr>
@@ -24182,7 +24206,7 @@
       </p:pic>
       <p:sp>
         <p:nvSpPr>
-          <p:cNvPr id="197" name="Google Shape;197;p26"/>
+          <p:cNvPr id="193" name="Google Shape;193;p26"/>
           <p:cNvSpPr txBox="1"/>
           <p:nvPr/>
         </p:nvSpPr>
@@ -24272,7 +24296,7 @@
       </p:sp>
       <p:sp>
         <p:nvSpPr>
-          <p:cNvPr id="198" name="Google Shape;198;p26"/>
+          <p:cNvPr id="194" name="Google Shape;194;p26"/>
           <p:cNvSpPr txBox="1"/>
           <p:nvPr/>
         </p:nvSpPr>
@@ -24363,7 +24387,7 @@
       </p:sp>
       <p:sp>
         <p:nvSpPr>
-          <p:cNvPr id="199" name="Google Shape;199;p26"/>
+          <p:cNvPr id="195" name="Google Shape;195;p26"/>
           <p:cNvSpPr txBox="1"/>
           <p:nvPr/>
         </p:nvSpPr>
@@ -24535,7 +24559,7 @@
       </p:sp>
       <p:sp>
         <p:nvSpPr>
-          <p:cNvPr id="200" name="Google Shape;200;p26"/>
+          <p:cNvPr id="196" name="Google Shape;196;p26"/>
           <p:cNvSpPr/>
           <p:nvPr/>
         </p:nvSpPr>
@@ -24579,7 +24603,7 @@
       </p:sp>
       <p:sp>
         <p:nvSpPr>
-          <p:cNvPr id="201" name="Google Shape;201;p26"/>
+          <p:cNvPr id="197" name="Google Shape;197;p26"/>
           <p:cNvSpPr/>
           <p:nvPr/>
         </p:nvSpPr>
@@ -24634,7 +24658,7 @@
   <p:cSld>
     <p:spTree>
       <p:nvGrpSpPr>
-        <p:cNvPr id="1" name="Shape 205"/>
+        <p:cNvPr id="1" name="Shape 201"/>
         <p:cNvGrpSpPr/>
         <p:nvPr/>
       </p:nvGrpSpPr>
@@ -24648,7 +24672,7 @@
       </p:grpSpPr>
       <p:pic>
         <p:nvPicPr>
-          <p:cNvPr id="206" name="Google Shape;206;p27"/>
+          <p:cNvPr id="202" name="Google Shape;202;p27"/>
           <p:cNvPicPr preferRelativeResize="0"/>
           <p:nvPr/>
         </p:nvPicPr>
@@ -24675,7 +24699,7 @@
       </p:pic>
       <p:sp>
         <p:nvSpPr>
-          <p:cNvPr id="207" name="Google Shape;207;p27"/>
+          <p:cNvPr id="203" name="Google Shape;203;p27"/>
           <p:cNvSpPr txBox="1"/>
           <p:nvPr/>
         </p:nvSpPr>
@@ -24741,7 +24765,7 @@
       </p:sp>
       <p:sp>
         <p:nvSpPr>
-          <p:cNvPr id="208" name="Google Shape;208;p27"/>
+          <p:cNvPr id="204" name="Google Shape;204;p27"/>
           <p:cNvSpPr txBox="1"/>
           <p:nvPr/>
         </p:nvSpPr>
@@ -25171,7 +25195,7 @@
       </p:sp>
       <p:pic>
         <p:nvPicPr>
-          <p:cNvPr id="209" name="Google Shape;209;p27"/>
+          <p:cNvPr id="205" name="Google Shape;205;p27"/>
           <p:cNvPicPr preferRelativeResize="0"/>
           <p:nvPr/>
         </p:nvPicPr>
@@ -25203,7 +25227,7 @@
       </p:pic>
       <p:sp>
         <p:nvSpPr>
-          <p:cNvPr id="210" name="Google Shape;210;p27"/>
+          <p:cNvPr id="206" name="Google Shape;206;p27"/>
           <p:cNvSpPr txBox="1"/>
           <p:nvPr/>
         </p:nvSpPr>
@@ -25282,7 +25306,7 @@
       </p:sp>
       <p:sp>
         <p:nvSpPr>
-          <p:cNvPr id="211" name="Google Shape;211;p27"/>
+          <p:cNvPr id="207" name="Google Shape;207;p27"/>
           <p:cNvSpPr txBox="1"/>
           <p:nvPr/>
         </p:nvSpPr>
@@ -25359,7 +25383,7 @@
   <p:cSld>
     <p:spTree>
       <p:nvGrpSpPr>
-        <p:cNvPr id="1" name="Shape 215"/>
+        <p:cNvPr id="1" name="Shape 211"/>
         <p:cNvGrpSpPr/>
         <p:nvPr/>
       </p:nvGrpSpPr>
@@ -25373,7 +25397,7 @@
       </p:grpSpPr>
       <p:sp>
         <p:nvSpPr>
-          <p:cNvPr id="216" name="Google Shape;216;p28"/>
+          <p:cNvPr id="212" name="Google Shape;212;p28"/>
           <p:cNvSpPr txBox="1"/>
           <p:nvPr/>
         </p:nvSpPr>
@@ -29876,9 +29900,9 @@
               <a:buNone/>
             </a:pPr>
             <a:r>
-              <a:rPr lang="en" sz="1300">
-                <a:solidFill>
-                  <a:schemeClr val="dk1"/>
+              <a:rPr lang="en" sz="1300" b="1">
+                <a:solidFill>
+                  <a:srgbClr val="FF0000"/>
                 </a:solidFill>
                 <a:latin typeface="Calibri"/>
                 <a:ea typeface="Calibri"/>
@@ -29887,9 +29911,9 @@
               </a:rPr>
               <a:t>Apple + OpenAI</a:t>
             </a:r>
-            <a:endParaRPr sz="1300">
+            <a:endParaRPr sz="1300" b="1">
               <a:solidFill>
-                <a:schemeClr val="dk1"/>
+                <a:srgbClr val="FF0000"/>
               </a:solidFill>
               <a:latin typeface="Calibri"/>
               <a:ea typeface="Calibri"/>
@@ -30228,273 +30252,9 @@
           </a:p>
         </p:txBody>
       </p:sp>
-      <p:sp>
-        <p:nvSpPr>
-          <p:cNvPr id="130" name="Google Shape;130;p20"/>
-          <p:cNvSpPr txBox="1"/>
-          <p:nvPr/>
-        </p:nvSpPr>
-        <p:spPr>
-          <a:xfrm>
-            <a:off x="4622050" y="3161800"/>
-            <a:ext cx="4465200" cy="218400"/>
-          </a:xfrm>
-          <a:prstGeom prst="rect">
-            <a:avLst/>
-          </a:prstGeom>
-          <a:solidFill>
-            <a:srgbClr val="FFF2CC"/>
-          </a:solidFill>
-          <a:ln w="9525" cap="flat" cmpd="sng">
-            <a:solidFill>
-              <a:srgbClr val="FF0000"/>
-            </a:solidFill>
-            <a:prstDash val="solid"/>
-            <a:round/>
-            <a:headEnd type="none" w="sm" len="sm"/>
-            <a:tailEnd type="none" w="sm" len="sm"/>
-          </a:ln>
-        </p:spPr>
-        <p:txBody>
-          <a:bodyPr spcFirstLastPara="1" wrap="square" lIns="9125" tIns="9125" rIns="9125" bIns="9125" anchor="t" anchorCtr="0">
-            <a:spAutoFit/>
-          </a:bodyPr>
-          <a:lstStyle/>
-          <a:p>
-            <a:pPr marL="0" lvl="0" indent="0" algn="l" rtl="0">
-              <a:spcBef>
-                <a:spcPts val="0"/>
-              </a:spcBef>
-              <a:spcAft>
-                <a:spcPts val="0"/>
-              </a:spcAft>
-              <a:buNone/>
-            </a:pPr>
-            <a:r>
-              <a:rPr lang="en" sz="1300">
-                <a:solidFill>
-                  <a:schemeClr val="dk1"/>
-                </a:solidFill>
-                <a:latin typeface="Calibri"/>
-                <a:ea typeface="Calibri"/>
-                <a:cs typeface="Calibri"/>
-                <a:sym typeface="Calibri"/>
-              </a:rPr>
-              <a:t>xxxxx</a:t>
-            </a:r>
-            <a:endParaRPr sz="1300">
-              <a:solidFill>
-                <a:schemeClr val="dk1"/>
-              </a:solidFill>
-              <a:latin typeface="Calibri"/>
-              <a:ea typeface="Calibri"/>
-              <a:cs typeface="Calibri"/>
-              <a:sym typeface="Calibri"/>
-            </a:endParaRPr>
-          </a:p>
-        </p:txBody>
-      </p:sp>
-      <p:sp>
-        <p:nvSpPr>
-          <p:cNvPr id="131" name="Google Shape;131;p20"/>
-          <p:cNvSpPr txBox="1"/>
-          <p:nvPr/>
-        </p:nvSpPr>
-        <p:spPr>
-          <a:xfrm>
-            <a:off x="4622050" y="3700692"/>
-            <a:ext cx="4465200" cy="218400"/>
-          </a:xfrm>
-          <a:prstGeom prst="rect">
-            <a:avLst/>
-          </a:prstGeom>
-          <a:solidFill>
-            <a:srgbClr val="FFF2CC"/>
-          </a:solidFill>
-          <a:ln w="9525" cap="flat" cmpd="sng">
-            <a:solidFill>
-              <a:srgbClr val="FF0000"/>
-            </a:solidFill>
-            <a:prstDash val="solid"/>
-            <a:round/>
-            <a:headEnd type="none" w="sm" len="sm"/>
-            <a:tailEnd type="none" w="sm" len="sm"/>
-          </a:ln>
-        </p:spPr>
-        <p:txBody>
-          <a:bodyPr spcFirstLastPara="1" wrap="square" lIns="9125" tIns="9125" rIns="9125" bIns="9125" anchor="t" anchorCtr="0">
-            <a:spAutoFit/>
-          </a:bodyPr>
-          <a:lstStyle/>
-          <a:p>
-            <a:pPr marL="0" lvl="0" indent="0" algn="l" rtl="0">
-              <a:spcBef>
-                <a:spcPts val="0"/>
-              </a:spcBef>
-              <a:spcAft>
-                <a:spcPts val="0"/>
-              </a:spcAft>
-              <a:buNone/>
-            </a:pPr>
-            <a:r>
-              <a:rPr lang="en" sz="1300">
-                <a:solidFill>
-                  <a:schemeClr val="dk1"/>
-                </a:solidFill>
-                <a:latin typeface="Calibri"/>
-                <a:ea typeface="Calibri"/>
-                <a:cs typeface="Calibri"/>
-                <a:sym typeface="Calibri"/>
-              </a:rPr>
-              <a:t>xxxxx</a:t>
-            </a:r>
-            <a:endParaRPr sz="1300">
-              <a:solidFill>
-                <a:schemeClr val="dk1"/>
-              </a:solidFill>
-              <a:latin typeface="Calibri"/>
-              <a:ea typeface="Calibri"/>
-              <a:cs typeface="Calibri"/>
-              <a:sym typeface="Calibri"/>
-            </a:endParaRPr>
-          </a:p>
-        </p:txBody>
-      </p:sp>
-      <p:sp>
-        <p:nvSpPr>
-          <p:cNvPr id="132" name="Google Shape;132;p20"/>
-          <p:cNvSpPr txBox="1"/>
-          <p:nvPr/>
-        </p:nvSpPr>
-        <p:spPr>
-          <a:xfrm>
-            <a:off x="4622050" y="4239583"/>
-            <a:ext cx="4465200" cy="218400"/>
-          </a:xfrm>
-          <a:prstGeom prst="rect">
-            <a:avLst/>
-          </a:prstGeom>
-          <a:solidFill>
-            <a:srgbClr val="FFF2CC"/>
-          </a:solidFill>
-          <a:ln w="9525" cap="flat" cmpd="sng">
-            <a:solidFill>
-              <a:srgbClr val="FF0000"/>
-            </a:solidFill>
-            <a:prstDash val="solid"/>
-            <a:round/>
-            <a:headEnd type="none" w="sm" len="sm"/>
-            <a:tailEnd type="none" w="sm" len="sm"/>
-          </a:ln>
-        </p:spPr>
-        <p:txBody>
-          <a:bodyPr spcFirstLastPara="1" wrap="square" lIns="9125" tIns="9125" rIns="9125" bIns="9125" anchor="t" anchorCtr="0">
-            <a:spAutoFit/>
-          </a:bodyPr>
-          <a:lstStyle/>
-          <a:p>
-            <a:pPr marL="0" lvl="0" indent="0" algn="l" rtl="0">
-              <a:spcBef>
-                <a:spcPts val="0"/>
-              </a:spcBef>
-              <a:spcAft>
-                <a:spcPts val="0"/>
-              </a:spcAft>
-              <a:buNone/>
-            </a:pPr>
-            <a:r>
-              <a:rPr lang="en" sz="1300">
-                <a:solidFill>
-                  <a:schemeClr val="dk1"/>
-                </a:solidFill>
-                <a:latin typeface="Calibri"/>
-                <a:ea typeface="Calibri"/>
-                <a:cs typeface="Calibri"/>
-                <a:sym typeface="Calibri"/>
-              </a:rPr>
-              <a:t>xxxxx</a:t>
-            </a:r>
-            <a:endParaRPr sz="1300">
-              <a:solidFill>
-                <a:schemeClr val="dk1"/>
-              </a:solidFill>
-              <a:latin typeface="Calibri"/>
-              <a:ea typeface="Calibri"/>
-              <a:cs typeface="Calibri"/>
-              <a:sym typeface="Calibri"/>
-            </a:endParaRPr>
-          </a:p>
-        </p:txBody>
-      </p:sp>
-      <p:sp>
-        <p:nvSpPr>
-          <p:cNvPr id="133" name="Google Shape;133;p20"/>
-          <p:cNvSpPr txBox="1"/>
-          <p:nvPr/>
-        </p:nvSpPr>
-        <p:spPr>
-          <a:xfrm>
-            <a:off x="4622050" y="4778475"/>
-            <a:ext cx="4465200" cy="218400"/>
-          </a:xfrm>
-          <a:prstGeom prst="rect">
-            <a:avLst/>
-          </a:prstGeom>
-          <a:solidFill>
-            <a:srgbClr val="FFF2CC"/>
-          </a:solidFill>
-          <a:ln w="9525" cap="flat" cmpd="sng">
-            <a:solidFill>
-              <a:srgbClr val="FF0000"/>
-            </a:solidFill>
-            <a:prstDash val="solid"/>
-            <a:round/>
-            <a:headEnd type="none" w="sm" len="sm"/>
-            <a:tailEnd type="none" w="sm" len="sm"/>
-          </a:ln>
-        </p:spPr>
-        <p:txBody>
-          <a:bodyPr spcFirstLastPara="1" wrap="square" lIns="9125" tIns="9125" rIns="9125" bIns="9125" anchor="t" anchorCtr="0">
-            <a:spAutoFit/>
-          </a:bodyPr>
-          <a:lstStyle/>
-          <a:p>
-            <a:pPr marL="0" lvl="0" indent="0" algn="l" rtl="0">
-              <a:spcBef>
-                <a:spcPts val="0"/>
-              </a:spcBef>
-              <a:spcAft>
-                <a:spcPts val="0"/>
-              </a:spcAft>
-              <a:buNone/>
-            </a:pPr>
-            <a:r>
-              <a:rPr lang="en" sz="1300">
-                <a:solidFill>
-                  <a:schemeClr val="dk1"/>
-                </a:solidFill>
-                <a:latin typeface="Calibri"/>
-                <a:ea typeface="Calibri"/>
-                <a:cs typeface="Calibri"/>
-                <a:sym typeface="Calibri"/>
-              </a:rPr>
-              <a:t>xxxxx</a:t>
-            </a:r>
-            <a:endParaRPr sz="1300">
-              <a:solidFill>
-                <a:schemeClr val="dk1"/>
-              </a:solidFill>
-              <a:latin typeface="Calibri"/>
-              <a:ea typeface="Calibri"/>
-              <a:cs typeface="Calibri"/>
-              <a:sym typeface="Calibri"/>
-            </a:endParaRPr>
-          </a:p>
-        </p:txBody>
-      </p:sp>
       <p:pic>
         <p:nvPicPr>
-          <p:cNvPr id="134" name="Google Shape;134;p20"/>
+          <p:cNvPr id="130" name="Google Shape;130;p20"/>
           <p:cNvPicPr preferRelativeResize="0"/>
           <p:nvPr/>
         </p:nvPicPr>
@@ -30538,7 +30298,7 @@
   <p:cSld>
     <p:spTree>
       <p:nvGrpSpPr>
-        <p:cNvPr id="1" name="Shape 138"/>
+        <p:cNvPr id="1" name="Shape 134"/>
         <p:cNvGrpSpPr/>
         <p:nvPr/>
       </p:nvGrpSpPr>
@@ -30552,7 +30312,7 @@
       </p:grpSpPr>
       <p:sp>
         <p:nvSpPr>
-          <p:cNvPr id="139" name="Google Shape;139;p21"/>
+          <p:cNvPr id="135" name="Google Shape;135;p21"/>
           <p:cNvSpPr txBox="1"/>
           <p:nvPr/>
         </p:nvSpPr>
@@ -30618,7 +30378,7 @@
       </p:sp>
       <p:sp>
         <p:nvSpPr>
-          <p:cNvPr id="140" name="Google Shape;140;p21"/>
+          <p:cNvPr id="136" name="Google Shape;136;p21"/>
           <p:cNvSpPr txBox="1"/>
           <p:nvPr/>
         </p:nvSpPr>
@@ -30919,7 +30679,7 @@
       </p:sp>
       <p:sp>
         <p:nvSpPr>
-          <p:cNvPr id="141" name="Google Shape;141;p21"/>
+          <p:cNvPr id="137" name="Google Shape;137;p21"/>
           <p:cNvSpPr txBox="1"/>
           <p:nvPr/>
         </p:nvSpPr>
@@ -30977,7 +30737,7 @@
       </p:sp>
       <p:sp>
         <p:nvSpPr>
-          <p:cNvPr id="142" name="Google Shape;142;p21"/>
+          <p:cNvPr id="138" name="Google Shape;138;p21"/>
           <p:cNvSpPr txBox="1"/>
           <p:nvPr/>
         </p:nvSpPr>
@@ -31055,7 +30815,7 @@
       </p:sp>
       <p:pic>
         <p:nvPicPr>
-          <p:cNvPr id="143" name="Google Shape;143;p21"/>
+          <p:cNvPr id="139" name="Google Shape;139;p21"/>
           <p:cNvPicPr preferRelativeResize="0"/>
           <p:nvPr/>
         </p:nvPicPr>
@@ -31088,7 +30848,7 @@
       </p:pic>
       <p:pic>
         <p:nvPicPr>
-          <p:cNvPr id="144" name="Google Shape;144;p21"/>
+          <p:cNvPr id="140" name="Google Shape;140;p21"/>
           <p:cNvPicPr preferRelativeResize="0"/>
           <p:nvPr/>
         </p:nvPicPr>
@@ -31121,7 +30881,7 @@
       </p:pic>
       <p:sp>
         <p:nvSpPr>
-          <p:cNvPr id="145" name="Google Shape;145;p21"/>
+          <p:cNvPr id="141" name="Google Shape;141;p21"/>
           <p:cNvSpPr txBox="1"/>
           <p:nvPr/>
         </p:nvSpPr>
@@ -31179,7 +30939,7 @@
       </p:sp>
       <p:pic>
         <p:nvPicPr>
-          <p:cNvPr id="146" name="Google Shape;146;p21"/>
+          <p:cNvPr id="142" name="Google Shape;142;p21"/>
           <p:cNvPicPr preferRelativeResize="0"/>
           <p:nvPr/>
         </p:nvPicPr>
@@ -31212,7 +30972,7 @@
       </p:pic>
       <p:sp>
         <p:nvSpPr>
-          <p:cNvPr id="147" name="Google Shape;147;p21"/>
+          <p:cNvPr id="143" name="Google Shape;143;p21"/>
           <p:cNvSpPr txBox="1"/>
           <p:nvPr/>
         </p:nvSpPr>
@@ -31302,7 +31062,7 @@
       </p:sp>
       <p:pic>
         <p:nvPicPr>
-          <p:cNvPr id="148" name="Google Shape;148;p21"/>
+          <p:cNvPr id="144" name="Google Shape;144;p21"/>
           <p:cNvPicPr preferRelativeResize="0"/>
           <p:nvPr/>
         </p:nvPicPr>
@@ -31334,7 +31094,7 @@
       </p:pic>
       <p:sp>
         <p:nvSpPr>
-          <p:cNvPr id="149" name="Google Shape;149;p21"/>
+          <p:cNvPr id="145" name="Google Shape;145;p21"/>
           <p:cNvSpPr txBox="1"/>
           <p:nvPr/>
         </p:nvSpPr>
@@ -31403,7 +31163,7 @@
   <p:cSld>
     <p:spTree>
       <p:nvGrpSpPr>
-        <p:cNvPr id="1" name="Shape 153"/>
+        <p:cNvPr id="1" name="Shape 149"/>
         <p:cNvGrpSpPr/>
         <p:nvPr/>
       </p:nvGrpSpPr>
@@ -31417,7 +31177,7 @@
       </p:grpSpPr>
       <p:sp>
         <p:nvSpPr>
-          <p:cNvPr id="154" name="Google Shape;154;p22"/>
+          <p:cNvPr id="150" name="Google Shape;150;p22"/>
           <p:cNvSpPr txBox="1"/>
           <p:nvPr/>
         </p:nvSpPr>
@@ -31483,7 +31243,7 @@
       </p:sp>
       <p:sp>
         <p:nvSpPr>
-          <p:cNvPr id="155" name="Google Shape;155;p22"/>
+          <p:cNvPr id="151" name="Google Shape;151;p22"/>
           <p:cNvSpPr txBox="1"/>
           <p:nvPr/>
         </p:nvSpPr>
@@ -31533,7 +31293,7 @@
                 <a:cs typeface="Calibri"/>
                 <a:sym typeface="Calibri"/>
               </a:rPr>
-              <a:t>I used my standard prompt asking to list 10 presidents on my </a:t>
+              <a:t>I used my standard prompt asking to list 10 presidents </a:t>
             </a:r>
             <a:endParaRPr sz="1300">
               <a:solidFill>
@@ -31565,7 +31325,7 @@
                 <a:cs typeface="Calibri"/>
                 <a:sym typeface="Calibri"/>
               </a:rPr>
-              <a:t>M1 32GB MacBook Pro </a:t>
+              <a:t>on my M1 32GB MacBook Pro </a:t>
             </a:r>
             <a:endParaRPr sz="1300">
               <a:solidFill>
@@ -31597,7 +31357,55 @@
                 <a:cs typeface="Calibri"/>
                 <a:sym typeface="Calibri"/>
               </a:rPr>
-              <a:t>using ollama llama3-70b 4-bit model (~40GB size).</a:t>
+              <a:t>using ollama </a:t>
+            </a:r>
+            <a:r>
+              <a:rPr lang="en" sz="1300" b="1">
+                <a:solidFill>
+                  <a:srgbClr val="FF0000"/>
+                </a:solidFill>
+                <a:latin typeface="Calibri"/>
+                <a:ea typeface="Calibri"/>
+                <a:cs typeface="Calibri"/>
+                <a:sym typeface="Calibri"/>
+              </a:rPr>
+              <a:t>llama3-70b</a:t>
+            </a:r>
+            <a:r>
+              <a:rPr lang="en" sz="1300">
+                <a:solidFill>
+                  <a:schemeClr val="dk1"/>
+                </a:solidFill>
+                <a:latin typeface="Calibri"/>
+                <a:ea typeface="Calibri"/>
+                <a:cs typeface="Calibri"/>
+                <a:sym typeface="Calibri"/>
+              </a:rPr>
+              <a:t> 4-bit model (~</a:t>
+            </a:r>
+            <a:r>
+              <a:rPr lang="en" sz="1300" b="1">
+                <a:solidFill>
+                  <a:srgbClr val="FF0000"/>
+                </a:solidFill>
+                <a:latin typeface="Calibri"/>
+                <a:ea typeface="Calibri"/>
+                <a:cs typeface="Calibri"/>
+                <a:sym typeface="Calibri"/>
+              </a:rPr>
+              <a:t>40GB size</a:t>
+            </a:r>
+            <a:r>
+              <a:rPr lang="en" sz="1300">
+                <a:solidFill>
+                  <a:schemeClr val="dk1"/>
+                </a:solidFill>
+                <a:latin typeface="Calibri"/>
+                <a:ea typeface="Calibri"/>
+                <a:cs typeface="Calibri"/>
+                <a:sym typeface="Calibri"/>
+              </a:rPr>
+              <a:t>).</a:t>
             </a:r>
             <a:endParaRPr sz="1300">
               <a:solidFill>
@@ -31619,6 +31427,26 @@
               </a:spcAft>
               <a:buNone/>
             </a:pPr>
+            <a:endParaRPr sz="1300">
+              <a:solidFill>
+                <a:schemeClr val="dk1"/>
+              </a:solidFill>
+              <a:latin typeface="Calibri"/>
+              <a:ea typeface="Calibri"/>
+              <a:cs typeface="Calibri"/>
+              <a:sym typeface="Calibri"/>
+            </a:endParaRPr>
+          </a:p>
+          <a:p>
+            <a:pPr marL="0" lvl="0" indent="0" algn="l" rtl="0">
+              <a:spcBef>
+                <a:spcPts val="0"/>
+              </a:spcBef>
+              <a:spcAft>
+                <a:spcPts val="0"/>
+              </a:spcAft>
+              <a:buNone/>
+            </a:pPr>
             <a:r>
               <a:rPr lang="en" sz="1300">
                 <a:solidFill>
@@ -31629,7 +31457,7 @@
                 <a:cs typeface="Calibri"/>
                 <a:sym typeface="Calibri"/>
               </a:rPr>
-              <a:t>40GB &gt; 32GB</a:t>
+              <a:t>40GB &gt; 32GB, so the model couldn't fit into memory.</a:t>
             </a:r>
             <a:endParaRPr sz="1300">
               <a:solidFill>
@@ -31651,18 +31479,6 @@
               </a:spcAft>
               <a:buNone/>
             </a:pPr>
-            <a:r>
-              <a:rPr lang="en" sz="1300">
-                <a:solidFill>
-                  <a:schemeClr val="dk1"/>
-                </a:solidFill>
-                <a:latin typeface="Calibri"/>
-                <a:ea typeface="Calibri"/>
-                <a:cs typeface="Calibri"/>
-                <a:sym typeface="Calibri"/>
-              </a:rPr>
-              <a:t>So the model couldn't fit into memory.</a:t>
-            </a:r>
             <a:endParaRPr sz="1300">
               <a:solidFill>
                 <a:schemeClr val="dk1"/>
@@ -31681,26 +31497,6 @@
               <a:spcAft>
                 <a:spcPts val="0"/>
               </a:spcAft>
-              <a:buNone/>
-            </a:pPr>
-            <a:endParaRPr sz="1300">
-              <a:solidFill>
-                <a:schemeClr val="dk1"/>
-              </a:solidFill>
-              <a:latin typeface="Calibri"/>
-              <a:ea typeface="Calibri"/>
-              <a:cs typeface="Calibri"/>
-              <a:sym typeface="Calibri"/>
-            </a:endParaRPr>
-          </a:p>
-          <a:p>
-            <a:pPr marL="0" lvl="0" indent="0" algn="l" rtl="0">
-              <a:spcBef>
-                <a:spcPts val="0"/>
-              </a:spcBef>
-              <a:spcAft>
-                <a:spcPts val="0"/>
-              </a:spcAft>
               <a:buClr>
                 <a:schemeClr val="dk1"/>
               </a:buClr>
@@ -31718,7 +31514,31 @@
                 <a:cs typeface="Calibri"/>
                 <a:sym typeface="Calibri"/>
               </a:rPr>
-              <a:t>It took 1 hour and 20 minutes to generate the answer !!!</a:t>
+              <a:t>It took </a:t>
+            </a:r>
+            <a:r>
+              <a:rPr lang="en" sz="1300" b="1">
+                <a:solidFill>
+                  <a:srgbClr val="FF0000"/>
+                </a:solidFill>
+                <a:latin typeface="Calibri"/>
+                <a:ea typeface="Calibri"/>
+                <a:cs typeface="Calibri"/>
+                <a:sym typeface="Calibri"/>
+              </a:rPr>
+              <a:t>1 hour and 20 minutes</a:t>
+            </a:r>
+            <a:r>
+              <a:rPr lang="en" sz="1300">
+                <a:solidFill>
+                  <a:schemeClr val="dk1"/>
+                </a:solidFill>
+                <a:latin typeface="Calibri"/>
+                <a:ea typeface="Calibri"/>
+                <a:cs typeface="Calibri"/>
+                <a:sym typeface="Calibri"/>
+              </a:rPr>
+              <a:t> to generate the answer !!!</a:t>
             </a:r>
             <a:endParaRPr sz="1300">
               <a:solidFill>
@@ -31818,7 +31638,7 @@
       </p:sp>
       <p:sp>
         <p:nvSpPr>
-          <p:cNvPr id="156" name="Google Shape;156;p22"/>
+          <p:cNvPr id="152" name="Google Shape;152;p22"/>
           <p:cNvSpPr txBox="1"/>
           <p:nvPr/>
         </p:nvSpPr>
@@ -31859,9 +31679,9 @@
               <a:buNone/>
             </a:pPr>
             <a:r>
-              <a:rPr lang="en" sz="1200">
-                <a:solidFill>
-                  <a:schemeClr val="dk1"/>
+              <a:rPr lang="en" sz="1200" b="1">
+                <a:solidFill>
+                  <a:srgbClr val="FF0000"/>
                 </a:solidFill>
                 <a:latin typeface="Roboto Mono"/>
                 <a:ea typeface="Roboto Mono"/>
@@ -31870,9 +31690,9 @@
               </a:rPr>
               <a:t>Here is the output and stats:</a:t>
             </a:r>
-            <a:endParaRPr sz="1200">
+            <a:endParaRPr sz="1200" b="1">
               <a:solidFill>
-                <a:schemeClr val="dk1"/>
+                <a:srgbClr val="FF0000"/>
               </a:solidFill>
               <a:latin typeface="Roboto Mono"/>
               <a:ea typeface="Roboto Mono"/>

--- a/2024/2024-05-17-AI-Updates.pptx
+++ b/2024/2024-05-17-AI-Updates.pptx
@@ -264,6 +264,11 @@
       </a:defRPr>
     </a:lvl9pPr>
   </p:defaultTextStyle>
+  <p:extLst>
+    <p:ext uri="{EFAFB233-063F-42B5-8137-9DF3F51BA10A}">
+      <p15:sldGuideLst xmlns:p15="http://schemas.microsoft.com/office/powerpoint/2012/main"/>
+    </p:ext>
+  </p:extLst>
 </p:presentation>
 </file>
 
